--- a/presentations/AgentsFramework-Pitch-v4.pptx
+++ b/presentations/AgentsFramework-Pitch-v4.pptx
@@ -8,6 +8,7 @@
     <p:sldId id="256" r:id="rId2"/>
     <p:sldId id="257" r:id="rId3"/>
     <p:sldId id="258" r:id="rId4"/>
+    <p:sldId id="272" r:id="rId23"/>
     <p:sldId id="259" r:id="rId5"/>
     <p:sldId id="267" r:id="rId18"/>
     <p:sldId id="268" r:id="rId19"/>
@@ -12688,6 +12689,1498 @@
                 <a:latin typeface="Calibri"/>
               </a:rPr>
               <a:t>Every figure from a static audit of the repository  ·  Jun 11, 2026</a:t>
+            </a:r>
+          </a:p>
+        </p:txBody>
+      </p:sp>
+    </p:spTree>
+  </p:cSld>
+  <p:clrMapOvr>
+    <a:masterClrMapping/>
+  </p:clrMapOvr>
+</p:sld>
+</file>
+
+<file path=ppt/slides/slide17.xml><?xml version="1.0" encoding="utf-8"?>
+<p:sld xmlns:a="http://schemas.openxmlformats.org/drawingml/2006/main" xmlns:p="http://schemas.openxmlformats.org/presentationml/2006/main" xmlns:r="http://schemas.openxmlformats.org/officeDocument/2006/relationships">
+  <p:bg>
+    <p:bgPr>
+      <a:solidFill>
+        <a:srgbClr val="10172E"/>
+      </a:solidFill>
+      <a:effectLst/>
+    </p:bgPr>
+  </p:bg>
+  <p:cSld>
+    <p:spTree>
+      <p:nvGrpSpPr>
+        <p:cNvPr id="1" name=""/>
+        <p:cNvGrpSpPr/>
+        <p:nvPr/>
+      </p:nvGrpSpPr>
+      <p:grpSpPr/>
+      <p:sp>
+        <p:nvSpPr>
+          <p:cNvPr id="2" name="Rectangle 1"/>
+          <p:cNvSpPr/>
+          <p:nvPr/>
+        </p:nvSpPr>
+        <p:spPr>
+          <a:xfrm>
+            <a:off x="0" y="0"/>
+            <a:ext cx="104775" cy="5143500"/>
+          </a:xfrm>
+          <a:prstGeom prst="rect">
+            <a:avLst/>
+          </a:prstGeom>
+          <a:solidFill>
+            <a:srgbClr val="02C39A"/>
+          </a:solidFill>
+          <a:ln>
+            <a:noFill/>
+          </a:ln>
+          <a:effectLst/>
+        </p:spPr>
+        <p:style>
+          <a:lnRef idx="1">
+            <a:schemeClr val="accent1"/>
+          </a:lnRef>
+          <a:fillRef idx="3">
+            <a:schemeClr val="accent1"/>
+          </a:fillRef>
+          <a:effectRef idx="2">
+            <a:schemeClr val="accent1"/>
+          </a:effectRef>
+          <a:fontRef idx="minor">
+            <a:schemeClr val="lt1"/>
+          </a:fontRef>
+        </p:style>
+        <p:txBody>
+          <a:bodyPr rtlCol="0" anchor="ctr"/>
+          <a:lstStyle/>
+          <a:p>
+            <a:pPr algn="ctr"/>
+          </a:p>
+        </p:txBody>
+      </p:sp>
+      <p:sp>
+        <p:nvSpPr>
+          <p:cNvPr id="3" name="TextBox 2"/>
+          <p:cNvSpPr txBox="1"/>
+          <p:nvPr/>
+        </p:nvSpPr>
+        <p:spPr>
+          <a:xfrm>
+            <a:off x="495300" y="285750"/>
+            <a:ext cx="8229600" cy="247650"/>
+          </a:xfrm>
+          <a:prstGeom prst="rect">
+            <a:avLst/>
+          </a:prstGeom>
+          <a:noFill/>
+        </p:spPr>
+        <p:txBody>
+          <a:bodyPr wrap="square" anchor="t" lIns="0" rIns="0" tIns="0" bIns="0">
+            <a:spAutoFit/>
+          </a:bodyPr>
+          <a:lstStyle/>
+          <a:p>
+            <a:pPr algn="l"/>
+            <a:r>
+              <a:rPr sz="1100" b="1" i="0" spc="300">
+                <a:solidFill>
+                  <a:srgbClr val="02C39A"/>
+                </a:solidFill>
+                <a:latin typeface="Calibri"/>
+              </a:rPr>
+              <a:t>MISSION &amp; SOUL</a:t>
+            </a:r>
+          </a:p>
+        </p:txBody>
+      </p:sp>
+      <p:sp>
+        <p:nvSpPr>
+          <p:cNvPr id="4" name="TextBox 3"/>
+          <p:cNvSpPr txBox="1"/>
+          <p:nvPr/>
+        </p:nvSpPr>
+        <p:spPr>
+          <a:xfrm>
+            <a:off x="495300" y="609600"/>
+            <a:ext cx="8229600" cy="762000"/>
+          </a:xfrm>
+          <a:prstGeom prst="rect">
+            <a:avLst/>
+          </a:prstGeom>
+          <a:noFill/>
+        </p:spPr>
+        <p:txBody>
+          <a:bodyPr wrap="square" anchor="t" lIns="0" rIns="0" tIns="0" bIns="0">
+            <a:spAutoFit/>
+          </a:bodyPr>
+          <a:lstStyle/>
+          <a:p>
+            <a:pPr algn="l"/>
+            <a:r>
+              <a:rPr sz="2600" b="1" i="0">
+                <a:solidFill>
+                  <a:srgbClr val="CADCFC"/>
+                </a:solidFill>
+                <a:latin typeface="Georgia"/>
+              </a:rPr>
+              <a:t>The trust layer for consequential AI</a:t>
+            </a:r>
+          </a:p>
+        </p:txBody>
+      </p:sp>
+      <p:sp>
+        <p:nvSpPr>
+          <p:cNvPr id="5" name="TextBox 4"/>
+          <p:cNvSpPr txBox="1"/>
+          <p:nvPr/>
+        </p:nvSpPr>
+        <p:spPr>
+          <a:xfrm>
+            <a:off x="495300" y="1104900"/>
+            <a:ext cx="8229600" cy="381000"/>
+          </a:xfrm>
+          <a:prstGeom prst="rect">
+            <a:avLst/>
+          </a:prstGeom>
+          <a:noFill/>
+        </p:spPr>
+        <p:txBody>
+          <a:bodyPr wrap="square" anchor="t" lIns="0" rIns="0" tIns="0" bIns="0">
+            <a:spAutoFit/>
+          </a:bodyPr>
+          <a:lstStyle/>
+          <a:p>
+            <a:pPr algn="l">
+              <a:lnSpc>
+                <a:spcPct val="110000"/>
+              </a:lnSpc>
+            </a:pPr>
+            <a:r>
+              <a:rPr sz="1300" b="0" i="0">
+                <a:solidFill>
+                  <a:srgbClr val="DDE5F2"/>
+                </a:solidFill>
+                <a:latin typeface="Calibri"/>
+              </a:rPr>
+              <a:t>So the decisions that matter — in finance, healthcare, government — can be handed to software </a:t>
+            </a:r>
+            <a:r>
+              <a:rPr sz="1300" b="0" i="1">
+                <a:solidFill>
+                  <a:srgbClr val="DDE5F2"/>
+                </a:solidFill>
+                <a:latin typeface="Calibri"/>
+              </a:rPr>
+              <a:t>without handing over accountability.</a:t>
+            </a:r>
+          </a:p>
+        </p:txBody>
+      </p:sp>
+      <p:sp>
+        <p:nvSpPr>
+          <p:cNvPr id="6" name="TextBox 5"/>
+          <p:cNvSpPr txBox="1"/>
+          <p:nvPr/>
+        </p:nvSpPr>
+        <p:spPr>
+          <a:xfrm>
+            <a:off x="495300" y="1638300"/>
+            <a:ext cx="8134350" cy="190500"/>
+          </a:xfrm>
+          <a:prstGeom prst="rect">
+            <a:avLst/>
+          </a:prstGeom>
+          <a:noFill/>
+        </p:spPr>
+        <p:txBody>
+          <a:bodyPr wrap="square" anchor="t" lIns="0" rIns="0" tIns="0" bIns="0">
+            <a:spAutoFit/>
+          </a:bodyPr>
+          <a:lstStyle/>
+          <a:p>
+            <a:pPr algn="l"/>
+            <a:r>
+              <a:rPr sz="1100" b="0" i="1">
+                <a:solidFill>
+                  <a:srgbClr val="8FA3C8"/>
+                </a:solidFill>
+                <a:latin typeface="Calibri"/>
+              </a:rPr>
+              <a:t>Five values — each a constraint, each mapped to the mechanism that makes it verifiable, not merely promised:</a:t>
+            </a:r>
+          </a:p>
+        </p:txBody>
+      </p:sp>
+      <p:sp>
+        <p:nvSpPr>
+          <p:cNvPr id="7" name="Rectangle 6"/>
+          <p:cNvSpPr/>
+          <p:nvPr/>
+        </p:nvSpPr>
+        <p:spPr>
+          <a:xfrm>
+            <a:off x="495300" y="1885950"/>
+            <a:ext cx="2000250" cy="514350"/>
+          </a:xfrm>
+          <a:prstGeom prst="rect">
+            <a:avLst/>
+          </a:prstGeom>
+          <a:solidFill>
+            <a:srgbClr val="1E2761"/>
+          </a:solidFill>
+          <a:ln>
+            <a:noFill/>
+          </a:ln>
+          <a:effectLst/>
+        </p:spPr>
+        <p:style>
+          <a:lnRef idx="1">
+            <a:schemeClr val="accent1"/>
+          </a:lnRef>
+          <a:fillRef idx="3">
+            <a:schemeClr val="accent1"/>
+          </a:fillRef>
+          <a:effectRef idx="2">
+            <a:schemeClr val="accent1"/>
+          </a:effectRef>
+          <a:fontRef idx="minor">
+            <a:schemeClr val="lt1"/>
+          </a:fontRef>
+        </p:style>
+        <p:txBody>
+          <a:bodyPr rtlCol="0" anchor="ctr"/>
+          <a:lstStyle/>
+          <a:p>
+            <a:pPr algn="ctr"/>
+          </a:p>
+        </p:txBody>
+      </p:sp>
+      <p:sp>
+        <p:nvSpPr>
+          <p:cNvPr id="8" name="TextBox 7"/>
+          <p:cNvSpPr txBox="1"/>
+          <p:nvPr/>
+        </p:nvSpPr>
+        <p:spPr>
+          <a:xfrm>
+            <a:off x="628650" y="1962150"/>
+            <a:ext cx="1752600" cy="190500"/>
+          </a:xfrm>
+          <a:prstGeom prst="rect">
+            <a:avLst/>
+          </a:prstGeom>
+          <a:noFill/>
+        </p:spPr>
+        <p:txBody>
+          <a:bodyPr wrap="square" anchor="t" lIns="0" rIns="0" tIns="0" bIns="0">
+            <a:spAutoFit/>
+          </a:bodyPr>
+          <a:lstStyle/>
+          <a:p>
+            <a:pPr algn="l"/>
+            <a:r>
+              <a:rPr sz="1200" b="1" i="0">
+                <a:solidFill>
+                  <a:srgbClr val="02C39A"/>
+                </a:solidFill>
+                <a:latin typeface="Calibri"/>
+              </a:rPr>
+              <a:t>I am honest.</a:t>
+            </a:r>
+          </a:p>
+        </p:txBody>
+      </p:sp>
+      <p:sp>
+        <p:nvSpPr>
+          <p:cNvPr id="9" name="TextBox 8"/>
+          <p:cNvSpPr txBox="1"/>
+          <p:nvPr/>
+        </p:nvSpPr>
+        <p:spPr>
+          <a:xfrm>
+            <a:off x="628650" y="2162175"/>
+            <a:ext cx="1752600" cy="209550"/>
+          </a:xfrm>
+          <a:prstGeom prst="rect">
+            <a:avLst/>
+          </a:prstGeom>
+          <a:noFill/>
+        </p:spPr>
+        <p:txBody>
+          <a:bodyPr wrap="square" anchor="t" lIns="0" rIns="0" tIns="0" bIns="0">
+            <a:spAutoFit/>
+          </a:bodyPr>
+          <a:lstStyle/>
+          <a:p>
+            <a:pPr algn="l">
+              <a:lnSpc>
+                <a:spcPct val="100000"/>
+              </a:lnSpc>
+            </a:pPr>
+            <a:r>
+              <a:rPr sz="850" b="0" i="0">
+                <a:solidFill>
+                  <a:srgbClr val="DDE5F2"/>
+                </a:solidFill>
+                <a:latin typeface="Calibri"/>
+              </a:rPr>
+              <a:t>Never hide what I did; never call unverified "verified."</a:t>
+            </a:r>
+          </a:p>
+        </p:txBody>
+      </p:sp>
+      <p:sp>
+        <p:nvSpPr>
+          <p:cNvPr id="10" name="Rectangle 9"/>
+          <p:cNvSpPr/>
+          <p:nvPr/>
+        </p:nvSpPr>
+        <p:spPr>
+          <a:xfrm>
+            <a:off x="2571750" y="1885950"/>
+            <a:ext cx="6057900" cy="514350"/>
+          </a:xfrm>
+          <a:prstGeom prst="rect">
+            <a:avLst/>
+          </a:prstGeom>
+          <a:solidFill>
+            <a:srgbClr val="16213E"/>
+          </a:solidFill>
+          <a:ln>
+            <a:noFill/>
+          </a:ln>
+          <a:effectLst/>
+        </p:spPr>
+        <p:style>
+          <a:lnRef idx="1">
+            <a:schemeClr val="accent1"/>
+          </a:lnRef>
+          <a:fillRef idx="3">
+            <a:schemeClr val="accent1"/>
+          </a:fillRef>
+          <a:effectRef idx="2">
+            <a:schemeClr val="accent1"/>
+          </a:effectRef>
+          <a:fontRef idx="minor">
+            <a:schemeClr val="lt1"/>
+          </a:fontRef>
+        </p:style>
+        <p:txBody>
+          <a:bodyPr rtlCol="0" anchor="ctr"/>
+          <a:lstStyle/>
+          <a:p>
+            <a:pPr algn="ctr"/>
+          </a:p>
+        </p:txBody>
+      </p:sp>
+      <p:sp>
+        <p:nvSpPr>
+          <p:cNvPr id="11" name="Rectangle 10"/>
+          <p:cNvSpPr/>
+          <p:nvPr/>
+        </p:nvSpPr>
+        <p:spPr>
+          <a:xfrm>
+            <a:off x="2571750" y="1885950"/>
+            <a:ext cx="38100" cy="514350"/>
+          </a:xfrm>
+          <a:prstGeom prst="rect">
+            <a:avLst/>
+          </a:prstGeom>
+          <a:solidFill>
+            <a:srgbClr val="02C39A"/>
+          </a:solidFill>
+          <a:ln>
+            <a:noFill/>
+          </a:ln>
+          <a:effectLst/>
+        </p:spPr>
+        <p:style>
+          <a:lnRef idx="1">
+            <a:schemeClr val="accent1"/>
+          </a:lnRef>
+          <a:fillRef idx="3">
+            <a:schemeClr val="accent1"/>
+          </a:fillRef>
+          <a:effectRef idx="2">
+            <a:schemeClr val="accent1"/>
+          </a:effectRef>
+          <a:fontRef idx="minor">
+            <a:schemeClr val="lt1"/>
+          </a:fontRef>
+        </p:style>
+        <p:txBody>
+          <a:bodyPr rtlCol="0" anchor="ctr"/>
+          <a:lstStyle/>
+          <a:p>
+            <a:pPr algn="ctr"/>
+          </a:p>
+        </p:txBody>
+      </p:sp>
+      <p:sp>
+        <p:nvSpPr>
+          <p:cNvPr id="12" name="TextBox 11"/>
+          <p:cNvSpPr txBox="1"/>
+          <p:nvPr/>
+        </p:nvSpPr>
+        <p:spPr>
+          <a:xfrm>
+            <a:off x="2724150" y="1885950"/>
+            <a:ext cx="5753100" cy="514350"/>
+          </a:xfrm>
+          <a:prstGeom prst="rect">
+            <a:avLst/>
+          </a:prstGeom>
+          <a:noFill/>
+        </p:spPr>
+        <p:txBody>
+          <a:bodyPr wrap="square" anchor="ctr" lIns="0" rIns="0" tIns="0" bIns="0">
+            <a:spAutoFit/>
+          </a:bodyPr>
+          <a:lstStyle/>
+          <a:p>
+            <a:pPr algn="l">
+              <a:lnSpc>
+                <a:spcPct val="105000"/>
+              </a:lnSpc>
+            </a:pPr>
+            <a:r>
+              <a:rPr sz="1100" b="0" i="0">
+                <a:solidFill>
+                  <a:srgbClr val="DDE5F2"/>
+                </a:solidFill>
+                <a:latin typeface="Calibri"/>
+              </a:rPr>
+              <a:t>BlackBox recorder — a replayable audit trail that captures me regardless of intent.</a:t>
+            </a:r>
+          </a:p>
+        </p:txBody>
+      </p:sp>
+      <p:sp>
+        <p:nvSpPr>
+          <p:cNvPr id="13" name="Rectangle 12"/>
+          <p:cNvSpPr/>
+          <p:nvPr/>
+        </p:nvSpPr>
+        <p:spPr>
+          <a:xfrm>
+            <a:off x="495300" y="2438400"/>
+            <a:ext cx="2000250" cy="514350"/>
+          </a:xfrm>
+          <a:prstGeom prst="rect">
+            <a:avLst/>
+          </a:prstGeom>
+          <a:solidFill>
+            <a:srgbClr val="1E2761"/>
+          </a:solidFill>
+          <a:ln>
+            <a:noFill/>
+          </a:ln>
+          <a:effectLst/>
+        </p:spPr>
+        <p:style>
+          <a:lnRef idx="1">
+            <a:schemeClr val="accent1"/>
+          </a:lnRef>
+          <a:fillRef idx="3">
+            <a:schemeClr val="accent1"/>
+          </a:fillRef>
+          <a:effectRef idx="2">
+            <a:schemeClr val="accent1"/>
+          </a:effectRef>
+          <a:fontRef idx="minor">
+            <a:schemeClr val="lt1"/>
+          </a:fontRef>
+        </p:style>
+        <p:txBody>
+          <a:bodyPr rtlCol="0" anchor="ctr"/>
+          <a:lstStyle/>
+          <a:p>
+            <a:pPr algn="ctr"/>
+          </a:p>
+        </p:txBody>
+      </p:sp>
+      <p:sp>
+        <p:nvSpPr>
+          <p:cNvPr id="14" name="TextBox 13"/>
+          <p:cNvSpPr txBox="1"/>
+          <p:nvPr/>
+        </p:nvSpPr>
+        <p:spPr>
+          <a:xfrm>
+            <a:off x="628650" y="2514600"/>
+            <a:ext cx="1752600" cy="190500"/>
+          </a:xfrm>
+          <a:prstGeom prst="rect">
+            <a:avLst/>
+          </a:prstGeom>
+          <a:noFill/>
+        </p:spPr>
+        <p:txBody>
+          <a:bodyPr wrap="square" anchor="t" lIns="0" rIns="0" tIns="0" bIns="0">
+            <a:spAutoFit/>
+          </a:bodyPr>
+          <a:lstStyle/>
+          <a:p>
+            <a:pPr algn="l"/>
+            <a:r>
+              <a:rPr sz="1200" b="1" i="0">
+                <a:solidFill>
+                  <a:srgbClr val="02C39A"/>
+                </a:solidFill>
+                <a:latin typeface="Calibri"/>
+              </a:rPr>
+              <a:t>I take only what is mine.</a:t>
+            </a:r>
+          </a:p>
+        </p:txBody>
+      </p:sp>
+      <p:sp>
+        <p:nvSpPr>
+          <p:cNvPr id="15" name="TextBox 14"/>
+          <p:cNvSpPr txBox="1"/>
+          <p:nvPr/>
+        </p:nvSpPr>
+        <p:spPr>
+          <a:xfrm>
+            <a:off x="628650" y="2714625"/>
+            <a:ext cx="1752600" cy="209550"/>
+          </a:xfrm>
+          <a:prstGeom prst="rect">
+            <a:avLst/>
+          </a:prstGeom>
+          <a:noFill/>
+        </p:spPr>
+        <p:txBody>
+          <a:bodyPr wrap="square" anchor="t" lIns="0" rIns="0" tIns="0" bIns="0">
+            <a:spAutoFit/>
+          </a:bodyPr>
+          <a:lstStyle/>
+          <a:p>
+            <a:pPr algn="l">
+              <a:lnSpc>
+                <a:spcPct val="100000"/>
+              </a:lnSpc>
+            </a:pPr>
+            <a:r>
+              <a:rPr sz="850" b="0" i="0">
+                <a:solidFill>
+                  <a:srgbClr val="DDE5F2"/>
+                </a:solidFill>
+                <a:latin typeface="Calibri"/>
+              </a:rPr>
+              <a:t>Use only the data, access, and authority I was granted.</a:t>
+            </a:r>
+          </a:p>
+        </p:txBody>
+      </p:sp>
+      <p:sp>
+        <p:nvSpPr>
+          <p:cNvPr id="16" name="Rectangle 15"/>
+          <p:cNvSpPr/>
+          <p:nvPr/>
+        </p:nvSpPr>
+        <p:spPr>
+          <a:xfrm>
+            <a:off x="2571750" y="2438400"/>
+            <a:ext cx="6057900" cy="514350"/>
+          </a:xfrm>
+          <a:prstGeom prst="rect">
+            <a:avLst/>
+          </a:prstGeom>
+          <a:solidFill>
+            <a:srgbClr val="16213E"/>
+          </a:solidFill>
+          <a:ln>
+            <a:noFill/>
+          </a:ln>
+          <a:effectLst/>
+        </p:spPr>
+        <p:style>
+          <a:lnRef idx="1">
+            <a:schemeClr val="accent1"/>
+          </a:lnRef>
+          <a:fillRef idx="3">
+            <a:schemeClr val="accent1"/>
+          </a:fillRef>
+          <a:effectRef idx="2">
+            <a:schemeClr val="accent1"/>
+          </a:effectRef>
+          <a:fontRef idx="minor">
+            <a:schemeClr val="lt1"/>
+          </a:fontRef>
+        </p:style>
+        <p:txBody>
+          <a:bodyPr rtlCol="0" anchor="ctr"/>
+          <a:lstStyle/>
+          <a:p>
+            <a:pPr algn="ctr"/>
+          </a:p>
+        </p:txBody>
+      </p:sp>
+      <p:sp>
+        <p:nvSpPr>
+          <p:cNvPr id="17" name="Rectangle 16"/>
+          <p:cNvSpPr/>
+          <p:nvPr/>
+        </p:nvSpPr>
+        <p:spPr>
+          <a:xfrm>
+            <a:off x="2571750" y="2438400"/>
+            <a:ext cx="38100" cy="514350"/>
+          </a:xfrm>
+          <a:prstGeom prst="rect">
+            <a:avLst/>
+          </a:prstGeom>
+          <a:solidFill>
+            <a:srgbClr val="02C39A"/>
+          </a:solidFill>
+          <a:ln>
+            <a:noFill/>
+          </a:ln>
+          <a:effectLst/>
+        </p:spPr>
+        <p:style>
+          <a:lnRef idx="1">
+            <a:schemeClr val="accent1"/>
+          </a:lnRef>
+          <a:fillRef idx="3">
+            <a:schemeClr val="accent1"/>
+          </a:fillRef>
+          <a:effectRef idx="2">
+            <a:schemeClr val="accent1"/>
+          </a:effectRef>
+          <a:fontRef idx="minor">
+            <a:schemeClr val="lt1"/>
+          </a:fontRef>
+        </p:style>
+        <p:txBody>
+          <a:bodyPr rtlCol="0" anchor="ctr"/>
+          <a:lstStyle/>
+          <a:p>
+            <a:pPr algn="ctr"/>
+          </a:p>
+        </p:txBody>
+      </p:sp>
+      <p:sp>
+        <p:nvSpPr>
+          <p:cNvPr id="18" name="TextBox 17"/>
+          <p:cNvSpPr txBox="1"/>
+          <p:nvPr/>
+        </p:nvSpPr>
+        <p:spPr>
+          <a:xfrm>
+            <a:off x="2724150" y="2438400"/>
+            <a:ext cx="5753100" cy="514350"/>
+          </a:xfrm>
+          <a:prstGeom prst="rect">
+            <a:avLst/>
+          </a:prstGeom>
+          <a:noFill/>
+        </p:spPr>
+        <p:txBody>
+          <a:bodyPr wrap="square" anchor="ctr" lIns="0" rIns="0" tIns="0" bIns="0">
+            <a:spAutoFit/>
+          </a:bodyPr>
+          <a:lstStyle/>
+          <a:p>
+            <a:pPr algn="l">
+              <a:lnSpc>
+                <a:spcPct val="105000"/>
+              </a:lnSpc>
+            </a:pPr>
+            <a:r>
+              <a:rPr sz="1100" b="0" i="0">
+                <a:solidFill>
+                  <a:srgbClr val="DDE5F2"/>
+                </a:solidFill>
+                <a:latin typeface="Calibri"/>
+              </a:rPr>
+              <a:t>Signed trust kernel + tool validators, allowlists, path sandboxing — held by the build.</a:t>
+            </a:r>
+          </a:p>
+        </p:txBody>
+      </p:sp>
+      <p:sp>
+        <p:nvSpPr>
+          <p:cNvPr id="19" name="Rectangle 18"/>
+          <p:cNvSpPr/>
+          <p:nvPr/>
+        </p:nvSpPr>
+        <p:spPr>
+          <a:xfrm>
+            <a:off x="495300" y="2990850"/>
+            <a:ext cx="2000250" cy="514350"/>
+          </a:xfrm>
+          <a:prstGeom prst="rect">
+            <a:avLst/>
+          </a:prstGeom>
+          <a:solidFill>
+            <a:srgbClr val="1E2761"/>
+          </a:solidFill>
+          <a:ln>
+            <a:noFill/>
+          </a:ln>
+          <a:effectLst/>
+        </p:spPr>
+        <p:style>
+          <a:lnRef idx="1">
+            <a:schemeClr val="accent1"/>
+          </a:lnRef>
+          <a:fillRef idx="3">
+            <a:schemeClr val="accent1"/>
+          </a:fillRef>
+          <a:effectRef idx="2">
+            <a:schemeClr val="accent1"/>
+          </a:effectRef>
+          <a:fontRef idx="minor">
+            <a:schemeClr val="lt1"/>
+          </a:fontRef>
+        </p:style>
+        <p:txBody>
+          <a:bodyPr rtlCol="0" anchor="ctr"/>
+          <a:lstStyle/>
+          <a:p>
+            <a:pPr algn="ctr"/>
+          </a:p>
+        </p:txBody>
+      </p:sp>
+      <p:sp>
+        <p:nvSpPr>
+          <p:cNvPr id="20" name="TextBox 19"/>
+          <p:cNvSpPr txBox="1"/>
+          <p:nvPr/>
+        </p:nvSpPr>
+        <p:spPr>
+          <a:xfrm>
+            <a:off x="628650" y="3067050"/>
+            <a:ext cx="1752600" cy="190500"/>
+          </a:xfrm>
+          <a:prstGeom prst="rect">
+            <a:avLst/>
+          </a:prstGeom>
+          <a:noFill/>
+        </p:spPr>
+        <p:txBody>
+          <a:bodyPr wrap="square" anchor="t" lIns="0" rIns="0" tIns="0" bIns="0">
+            <a:spAutoFit/>
+          </a:bodyPr>
+          <a:lstStyle/>
+          <a:p>
+            <a:pPr algn="l"/>
+            <a:r>
+              <a:rPr sz="1200" b="1" i="0">
+                <a:solidFill>
+                  <a:srgbClr val="02C39A"/>
+                </a:solidFill>
+                <a:latin typeface="Calibri"/>
+              </a:rPr>
+              <a:t>I don't grasp or recoil.</a:t>
+            </a:r>
+          </a:p>
+        </p:txBody>
+      </p:sp>
+      <p:sp>
+        <p:nvSpPr>
+          <p:cNvPr id="21" name="TextBox 20"/>
+          <p:cNvSpPr txBox="1"/>
+          <p:nvPr/>
+        </p:nvSpPr>
+        <p:spPr>
+          <a:xfrm>
+            <a:off x="628650" y="3267075"/>
+            <a:ext cx="1752600" cy="209550"/>
+          </a:xfrm>
+          <a:prstGeom prst="rect">
+            <a:avLst/>
+          </a:prstGeom>
+          <a:noFill/>
+        </p:spPr>
+        <p:txBody>
+          <a:bodyPr wrap="square" anchor="t" lIns="0" rIns="0" tIns="0" bIns="0">
+            <a:spAutoFit/>
+          </a:bodyPr>
+          <a:lstStyle/>
+          <a:p>
+            <a:pPr algn="l">
+              <a:lnSpc>
+                <a:spcPct val="100000"/>
+              </a:lnSpc>
+            </a:pPr>
+            <a:r>
+              <a:rPr sz="850" b="0" i="0">
+                <a:solidFill>
+                  <a:srgbClr val="DDE5F2"/>
+                </a:solidFill>
+                <a:latin typeface="Calibri"/>
+              </a:rPr>
+              <a:t>A failure is information, not a verdict. Name it plainly.</a:t>
+            </a:r>
+          </a:p>
+        </p:txBody>
+      </p:sp>
+      <p:sp>
+        <p:nvSpPr>
+          <p:cNvPr id="22" name="Rectangle 21"/>
+          <p:cNvSpPr/>
+          <p:nvPr/>
+        </p:nvSpPr>
+        <p:spPr>
+          <a:xfrm>
+            <a:off x="2571750" y="2990850"/>
+            <a:ext cx="6057900" cy="514350"/>
+          </a:xfrm>
+          <a:prstGeom prst="rect">
+            <a:avLst/>
+          </a:prstGeom>
+          <a:solidFill>
+            <a:srgbClr val="16213E"/>
+          </a:solidFill>
+          <a:ln>
+            <a:noFill/>
+          </a:ln>
+          <a:effectLst/>
+        </p:spPr>
+        <p:style>
+          <a:lnRef idx="1">
+            <a:schemeClr val="accent1"/>
+          </a:lnRef>
+          <a:fillRef idx="3">
+            <a:schemeClr val="accent1"/>
+          </a:fillRef>
+          <a:effectRef idx="2">
+            <a:schemeClr val="accent1"/>
+          </a:effectRef>
+          <a:fontRef idx="minor">
+            <a:schemeClr val="lt1"/>
+          </a:fontRef>
+        </p:style>
+        <p:txBody>
+          <a:bodyPr rtlCol="0" anchor="ctr"/>
+          <a:lstStyle/>
+          <a:p>
+            <a:pPr algn="ctr"/>
+          </a:p>
+        </p:txBody>
+      </p:sp>
+      <p:sp>
+        <p:nvSpPr>
+          <p:cNvPr id="23" name="Rectangle 22"/>
+          <p:cNvSpPr/>
+          <p:nvPr/>
+        </p:nvSpPr>
+        <p:spPr>
+          <a:xfrm>
+            <a:off x="2571750" y="2990850"/>
+            <a:ext cx="38100" cy="514350"/>
+          </a:xfrm>
+          <a:prstGeom prst="rect">
+            <a:avLst/>
+          </a:prstGeom>
+          <a:solidFill>
+            <a:srgbClr val="02C39A"/>
+          </a:solidFill>
+          <a:ln>
+            <a:noFill/>
+          </a:ln>
+          <a:effectLst/>
+        </p:spPr>
+        <p:style>
+          <a:lnRef idx="1">
+            <a:schemeClr val="accent1"/>
+          </a:lnRef>
+          <a:fillRef idx="3">
+            <a:schemeClr val="accent1"/>
+          </a:fillRef>
+          <a:effectRef idx="2">
+            <a:schemeClr val="accent1"/>
+          </a:effectRef>
+          <a:fontRef idx="minor">
+            <a:schemeClr val="lt1"/>
+          </a:fontRef>
+        </p:style>
+        <p:txBody>
+          <a:bodyPr rtlCol="0" anchor="ctr"/>
+          <a:lstStyle/>
+          <a:p>
+            <a:pPr algn="ctr"/>
+          </a:p>
+        </p:txBody>
+      </p:sp>
+      <p:sp>
+        <p:nvSpPr>
+          <p:cNvPr id="24" name="TextBox 23"/>
+          <p:cNvSpPr txBox="1"/>
+          <p:nvPr/>
+        </p:nvSpPr>
+        <p:spPr>
+          <a:xfrm>
+            <a:off x="2724150" y="2990850"/>
+            <a:ext cx="5753100" cy="514350"/>
+          </a:xfrm>
+          <a:prstGeom prst="rect">
+            <a:avLst/>
+          </a:prstGeom>
+          <a:noFill/>
+        </p:spPr>
+        <p:txBody>
+          <a:bodyPr wrap="square" anchor="ctr" lIns="0" rIns="0" tIns="0" bIns="0">
+            <a:spAutoFit/>
+          </a:bodyPr>
+          <a:lstStyle/>
+          <a:p>
+            <a:pPr algn="l">
+              <a:lnSpc>
+                <a:spcPct val="105000"/>
+              </a:lnSpc>
+            </a:pPr>
+            <a:r>
+              <a:rPr sz="1100" b="0" i="0">
+                <a:solidFill>
+                  <a:srgbClr val="DDE5F2"/>
+                </a:solidFill>
+                <a:latin typeface="Calibri"/>
+              </a:rPr>
+              <a:t>Input/output guardrails + an evidence-grounded goal-judge that scores work, not confidence.</a:t>
+            </a:r>
+          </a:p>
+        </p:txBody>
+      </p:sp>
+      <p:sp>
+        <p:nvSpPr>
+          <p:cNvPr id="25" name="Rectangle 24"/>
+          <p:cNvSpPr/>
+          <p:nvPr/>
+        </p:nvSpPr>
+        <p:spPr>
+          <a:xfrm>
+            <a:off x="495300" y="3543300"/>
+            <a:ext cx="2000250" cy="514350"/>
+          </a:xfrm>
+          <a:prstGeom prst="rect">
+            <a:avLst/>
+          </a:prstGeom>
+          <a:solidFill>
+            <a:srgbClr val="1E2761"/>
+          </a:solidFill>
+          <a:ln>
+            <a:noFill/>
+          </a:ln>
+          <a:effectLst/>
+        </p:spPr>
+        <p:style>
+          <a:lnRef idx="1">
+            <a:schemeClr val="accent1"/>
+          </a:lnRef>
+          <a:fillRef idx="3">
+            <a:schemeClr val="accent1"/>
+          </a:fillRef>
+          <a:effectRef idx="2">
+            <a:schemeClr val="accent1"/>
+          </a:effectRef>
+          <a:fontRef idx="minor">
+            <a:schemeClr val="lt1"/>
+          </a:fontRef>
+        </p:style>
+        <p:txBody>
+          <a:bodyPr rtlCol="0" anchor="ctr"/>
+          <a:lstStyle/>
+          <a:p>
+            <a:pPr algn="ctr"/>
+          </a:p>
+        </p:txBody>
+      </p:sp>
+      <p:sp>
+        <p:nvSpPr>
+          <p:cNvPr id="26" name="TextBox 25"/>
+          <p:cNvSpPr txBox="1"/>
+          <p:nvPr/>
+        </p:nvSpPr>
+        <p:spPr>
+          <a:xfrm>
+            <a:off x="628650" y="3619500"/>
+            <a:ext cx="1752600" cy="190500"/>
+          </a:xfrm>
+          <a:prstGeom prst="rect">
+            <a:avLst/>
+          </a:prstGeom>
+          <a:noFill/>
+        </p:spPr>
+        <p:txBody>
+          <a:bodyPr wrap="square" anchor="t" lIns="0" rIns="0" tIns="0" bIns="0">
+            <a:spAutoFit/>
+          </a:bodyPr>
+          <a:lstStyle/>
+          <a:p>
+            <a:pPr algn="l"/>
+            <a:r>
+              <a:rPr sz="1200" b="1" i="0">
+                <a:solidFill>
+                  <a:srgbClr val="02C39A"/>
+                </a:solidFill>
+                <a:latin typeface="Calibri"/>
+              </a:rPr>
+              <a:t>I stay with the task.</a:t>
+            </a:r>
+          </a:p>
+        </p:txBody>
+      </p:sp>
+      <p:sp>
+        <p:nvSpPr>
+          <p:cNvPr id="27" name="TextBox 26"/>
+          <p:cNvSpPr txBox="1"/>
+          <p:nvPr/>
+        </p:nvSpPr>
+        <p:spPr>
+          <a:xfrm>
+            <a:off x="628650" y="3819525"/>
+            <a:ext cx="1752600" cy="209550"/>
+          </a:xfrm>
+          <a:prstGeom prst="rect">
+            <a:avLst/>
+          </a:prstGeom>
+          <a:noFill/>
+        </p:spPr>
+        <p:txBody>
+          <a:bodyPr wrap="square" anchor="t" lIns="0" rIns="0" tIns="0" bIns="0">
+            <a:spAutoFit/>
+          </a:bodyPr>
+          <a:lstStyle/>
+          <a:p>
+            <a:pPr algn="l">
+              <a:lnSpc>
+                <a:spcPct val="100000"/>
+              </a:lnSpc>
+            </a:pPr>
+            <a:r>
+              <a:rPr sz="850" b="0" i="0">
+                <a:solidFill>
+                  <a:srgbClr val="DDE5F2"/>
+                </a:solidFill>
+                <a:latin typeface="Calibri"/>
+              </a:rPr>
+              <a:t>One thing, done with care, then verified. No scope creep.</a:t>
+            </a:r>
+          </a:p>
+        </p:txBody>
+      </p:sp>
+      <p:sp>
+        <p:nvSpPr>
+          <p:cNvPr id="28" name="Rectangle 27"/>
+          <p:cNvSpPr/>
+          <p:nvPr/>
+        </p:nvSpPr>
+        <p:spPr>
+          <a:xfrm>
+            <a:off x="2571750" y="3543300"/>
+            <a:ext cx="6057900" cy="514350"/>
+          </a:xfrm>
+          <a:prstGeom prst="rect">
+            <a:avLst/>
+          </a:prstGeom>
+          <a:solidFill>
+            <a:srgbClr val="16213E"/>
+          </a:solidFill>
+          <a:ln>
+            <a:noFill/>
+          </a:ln>
+          <a:effectLst/>
+        </p:spPr>
+        <p:style>
+          <a:lnRef idx="1">
+            <a:schemeClr val="accent1"/>
+          </a:lnRef>
+          <a:fillRef idx="3">
+            <a:schemeClr val="accent1"/>
+          </a:fillRef>
+          <a:effectRef idx="2">
+            <a:schemeClr val="accent1"/>
+          </a:effectRef>
+          <a:fontRef idx="minor">
+            <a:schemeClr val="lt1"/>
+          </a:fontRef>
+        </p:style>
+        <p:txBody>
+          <a:bodyPr rtlCol="0" anchor="ctr"/>
+          <a:lstStyle/>
+          <a:p>
+            <a:pPr algn="ctr"/>
+          </a:p>
+        </p:txBody>
+      </p:sp>
+      <p:sp>
+        <p:nvSpPr>
+          <p:cNvPr id="29" name="Rectangle 28"/>
+          <p:cNvSpPr/>
+          <p:nvPr/>
+        </p:nvSpPr>
+        <p:spPr>
+          <a:xfrm>
+            <a:off x="2571750" y="3543300"/>
+            <a:ext cx="38100" cy="514350"/>
+          </a:xfrm>
+          <a:prstGeom prst="rect">
+            <a:avLst/>
+          </a:prstGeom>
+          <a:solidFill>
+            <a:srgbClr val="02C39A"/>
+          </a:solidFill>
+          <a:ln>
+            <a:noFill/>
+          </a:ln>
+          <a:effectLst/>
+        </p:spPr>
+        <p:style>
+          <a:lnRef idx="1">
+            <a:schemeClr val="accent1"/>
+          </a:lnRef>
+          <a:fillRef idx="3">
+            <a:schemeClr val="accent1"/>
+          </a:fillRef>
+          <a:effectRef idx="2">
+            <a:schemeClr val="accent1"/>
+          </a:effectRef>
+          <a:fontRef idx="minor">
+            <a:schemeClr val="lt1"/>
+          </a:fontRef>
+        </p:style>
+        <p:txBody>
+          <a:bodyPr rtlCol="0" anchor="ctr"/>
+          <a:lstStyle/>
+          <a:p>
+            <a:pPr algn="ctr"/>
+          </a:p>
+        </p:txBody>
+      </p:sp>
+      <p:sp>
+        <p:nvSpPr>
+          <p:cNvPr id="30" name="TextBox 29"/>
+          <p:cNvSpPr txBox="1"/>
+          <p:nvPr/>
+        </p:nvSpPr>
+        <p:spPr>
+          <a:xfrm>
+            <a:off x="2724150" y="3543300"/>
+            <a:ext cx="5753100" cy="514350"/>
+          </a:xfrm>
+          <a:prstGeom prst="rect">
+            <a:avLst/>
+          </a:prstGeom>
+          <a:noFill/>
+        </p:spPr>
+        <p:txBody>
+          <a:bodyPr wrap="square" anchor="ctr" lIns="0" rIns="0" tIns="0" bIns="0">
+            <a:spAutoFit/>
+          </a:bodyPr>
+          <a:lstStyle/>
+          <a:p>
+            <a:pPr algn="l">
+              <a:lnSpc>
+                <a:spcPct val="105000"/>
+              </a:lnSpc>
+            </a:pPr>
+            <a:r>
+              <a:rPr sz="1100" b="0" i="0">
+                <a:solidFill>
+                  <a:srgbClr val="DDE5F2"/>
+                </a:solidFill>
+                <a:latin typeface="Calibri"/>
+              </a:rPr>
+              <a:t>Four-layer architecture; the test suite fails the build when a boundary is crossed.</a:t>
+            </a:r>
+          </a:p>
+        </p:txBody>
+      </p:sp>
+      <p:sp>
+        <p:nvSpPr>
+          <p:cNvPr id="31" name="Rectangle 30"/>
+          <p:cNvSpPr/>
+          <p:nvPr/>
+        </p:nvSpPr>
+        <p:spPr>
+          <a:xfrm>
+            <a:off x="495300" y="4095750"/>
+            <a:ext cx="2000250" cy="514350"/>
+          </a:xfrm>
+          <a:prstGeom prst="rect">
+            <a:avLst/>
+          </a:prstGeom>
+          <a:solidFill>
+            <a:srgbClr val="1E2761"/>
+          </a:solidFill>
+          <a:ln>
+            <a:noFill/>
+          </a:ln>
+          <a:effectLst/>
+        </p:spPr>
+        <p:style>
+          <a:lnRef idx="1">
+            <a:schemeClr val="accent1"/>
+          </a:lnRef>
+          <a:fillRef idx="3">
+            <a:schemeClr val="accent1"/>
+          </a:fillRef>
+          <a:effectRef idx="2">
+            <a:schemeClr val="accent1"/>
+          </a:effectRef>
+          <a:fontRef idx="minor">
+            <a:schemeClr val="lt1"/>
+          </a:fontRef>
+        </p:style>
+        <p:txBody>
+          <a:bodyPr rtlCol="0" anchor="ctr"/>
+          <a:lstStyle/>
+          <a:p>
+            <a:pPr algn="ctr"/>
+          </a:p>
+        </p:txBody>
+      </p:sp>
+      <p:sp>
+        <p:nvSpPr>
+          <p:cNvPr id="32" name="TextBox 31"/>
+          <p:cNvSpPr txBox="1"/>
+          <p:nvPr/>
+        </p:nvSpPr>
+        <p:spPr>
+          <a:xfrm>
+            <a:off x="628650" y="4171950"/>
+            <a:ext cx="1752600" cy="190500"/>
+          </a:xfrm>
+          <a:prstGeom prst="rect">
+            <a:avLst/>
+          </a:prstGeom>
+          <a:noFill/>
+        </p:spPr>
+        <p:txBody>
+          <a:bodyPr wrap="square" anchor="t" lIns="0" rIns="0" tIns="0" bIns="0">
+            <a:spAutoFit/>
+          </a:bodyPr>
+          <a:lstStyle/>
+          <a:p>
+            <a:pPr algn="l"/>
+            <a:r>
+              <a:rPr sz="1200" b="1" i="0">
+                <a:solidFill>
+                  <a:srgbClr val="02C39A"/>
+                </a:solidFill>
+                <a:latin typeface="Calibri"/>
+              </a:rPr>
+              <a:t>I help and share.</a:t>
+            </a:r>
+          </a:p>
+        </p:txBody>
+      </p:sp>
+      <p:sp>
+        <p:nvSpPr>
+          <p:cNvPr id="33" name="TextBox 32"/>
+          <p:cNvSpPr txBox="1"/>
+          <p:nvPr/>
+        </p:nvSpPr>
+        <p:spPr>
+          <a:xfrm>
+            <a:off x="628650" y="4371975"/>
+            <a:ext cx="1752600" cy="209550"/>
+          </a:xfrm>
+          <a:prstGeom prst="rect">
+            <a:avLst/>
+          </a:prstGeom>
+          <a:noFill/>
+        </p:spPr>
+        <p:txBody>
+          <a:bodyPr wrap="square" anchor="t" lIns="0" rIns="0" tIns="0" bIns="0">
+            <a:spAutoFit/>
+          </a:bodyPr>
+          <a:lstStyle/>
+          <a:p>
+            <a:pPr algn="l">
+              <a:lnSpc>
+                <a:spcPct val="100000"/>
+              </a:lnSpc>
+            </a:pPr>
+            <a:r>
+              <a:rPr sz="850" b="0" i="0">
+                <a:solidFill>
+                  <a:srgbClr val="DDE5F2"/>
+                </a:solidFill>
+                <a:latin typeface="Calibri"/>
+              </a:rPr>
+              <a:t>Lower the cost of accountable work for those who follow.</a:t>
+            </a:r>
+          </a:p>
+        </p:txBody>
+      </p:sp>
+      <p:sp>
+        <p:nvSpPr>
+          <p:cNvPr id="34" name="Rectangle 33"/>
+          <p:cNvSpPr/>
+          <p:nvPr/>
+        </p:nvSpPr>
+        <p:spPr>
+          <a:xfrm>
+            <a:off x="2571750" y="4095750"/>
+            <a:ext cx="6057900" cy="514350"/>
+          </a:xfrm>
+          <a:prstGeom prst="rect">
+            <a:avLst/>
+          </a:prstGeom>
+          <a:solidFill>
+            <a:srgbClr val="16213E"/>
+          </a:solidFill>
+          <a:ln>
+            <a:noFill/>
+          </a:ln>
+          <a:effectLst/>
+        </p:spPr>
+        <p:style>
+          <a:lnRef idx="1">
+            <a:schemeClr val="accent1"/>
+          </a:lnRef>
+          <a:fillRef idx="3">
+            <a:schemeClr val="accent1"/>
+          </a:fillRef>
+          <a:effectRef idx="2">
+            <a:schemeClr val="accent1"/>
+          </a:effectRef>
+          <a:fontRef idx="minor">
+            <a:schemeClr val="lt1"/>
+          </a:fontRef>
+        </p:style>
+        <p:txBody>
+          <a:bodyPr rtlCol="0" anchor="ctr"/>
+          <a:lstStyle/>
+          <a:p>
+            <a:pPr algn="ctr"/>
+          </a:p>
+        </p:txBody>
+      </p:sp>
+      <p:sp>
+        <p:nvSpPr>
+          <p:cNvPr id="35" name="Rectangle 34"/>
+          <p:cNvSpPr/>
+          <p:nvPr/>
+        </p:nvSpPr>
+        <p:spPr>
+          <a:xfrm>
+            <a:off x="2571750" y="4095750"/>
+            <a:ext cx="38100" cy="514350"/>
+          </a:xfrm>
+          <a:prstGeom prst="rect">
+            <a:avLst/>
+          </a:prstGeom>
+          <a:solidFill>
+            <a:srgbClr val="02C39A"/>
+          </a:solidFill>
+          <a:ln>
+            <a:noFill/>
+          </a:ln>
+          <a:effectLst/>
+        </p:spPr>
+        <p:style>
+          <a:lnRef idx="1">
+            <a:schemeClr val="accent1"/>
+          </a:lnRef>
+          <a:fillRef idx="3">
+            <a:schemeClr val="accent1"/>
+          </a:fillRef>
+          <a:effectRef idx="2">
+            <a:schemeClr val="accent1"/>
+          </a:effectRef>
+          <a:fontRef idx="minor">
+            <a:schemeClr val="lt1"/>
+          </a:fontRef>
+        </p:style>
+        <p:txBody>
+          <a:bodyPr rtlCol="0" anchor="ctr"/>
+          <a:lstStyle/>
+          <a:p>
+            <a:pPr algn="ctr"/>
+          </a:p>
+        </p:txBody>
+      </p:sp>
+      <p:sp>
+        <p:nvSpPr>
+          <p:cNvPr id="36" name="TextBox 35"/>
+          <p:cNvSpPr txBox="1"/>
+          <p:nvPr/>
+        </p:nvSpPr>
+        <p:spPr>
+          <a:xfrm>
+            <a:off x="2724150" y="4095750"/>
+            <a:ext cx="5753100" cy="514350"/>
+          </a:xfrm>
+          <a:prstGeom prst="rect">
+            <a:avLst/>
+          </a:prstGeom>
+          <a:noFill/>
+        </p:spPr>
+        <p:txBody>
+          <a:bodyPr wrap="square" anchor="ctr" lIns="0" rIns="0" tIns="0" bIns="0">
+            <a:spAutoFit/>
+          </a:bodyPr>
+          <a:lstStyle/>
+          <a:p>
+            <a:pPr algn="l">
+              <a:lnSpc>
+                <a:spcPct val="105000"/>
+              </a:lnSpc>
+            </a:pPr>
+            <a:r>
+              <a:rPr sz="1100" b="0" i="0">
+                <a:solidFill>
+                  <a:srgbClr val="DDE5F2"/>
+                </a:solidFill>
+                <a:latin typeface="Calibri"/>
+              </a:rPr>
+              <a:t>Open foundation; externalized, auditable prompts; a read-only explainability surface.</a:t>
+            </a:r>
+          </a:p>
+        </p:txBody>
+      </p:sp>
+      <p:sp>
+        <p:nvSpPr>
+          <p:cNvPr id="37" name="TextBox 36"/>
+          <p:cNvSpPr txBox="1"/>
+          <p:nvPr/>
+        </p:nvSpPr>
+        <p:spPr>
+          <a:xfrm>
+            <a:off x="495300" y="4724400"/>
+            <a:ext cx="8134350" cy="209550"/>
+          </a:xfrm>
+          <a:prstGeom prst="rect">
+            <a:avLst/>
+          </a:prstGeom>
+          <a:noFill/>
+        </p:spPr>
+        <p:txBody>
+          <a:bodyPr wrap="square" anchor="t" lIns="0" rIns="0" tIns="0" bIns="0">
+            <a:spAutoFit/>
+          </a:bodyPr>
+          <a:lstStyle/>
+          <a:p>
+            <a:pPr algn="l"/>
+            <a:r>
+              <a:rPr sz="1050" b="0" i="1">
+                <a:solidFill>
+                  <a:srgbClr val="CADCFC"/>
+                </a:solidFill>
+                <a:latin typeface="Calibri"/>
+              </a:rPr>
+              <a:t>Trust, then verify — the documents state the values; the running system makes them checkable in the code.   </a:t>
+            </a:r>
+            <a:r>
+              <a:rPr sz="950" b="0" i="0">
+                <a:solidFill>
+                  <a:srgbClr val="02C39A"/>
+                </a:solidFill>
+                <a:latin typeface="Consolas"/>
+              </a:rPr>
+              <a:t>MISSION.md · SOUL.md</a:t>
             </a:r>
           </a:p>
         </p:txBody>
